--- a/estandar-a/templates/3-4-3-material-capacitacion.pptx
+++ b/estandar-a/templates/3-4-3-material-capacitacion.pptx
@@ -3256,7 +3256,7 @@
                 <a:solidFill>
                   <a:srgbClr val="F7C031"/>
                 </a:solidFill>
-                <a:latin typeface="Calibri"/>
+                <a:latin typeface="Afacad"/>
               </a:rPr>
               <a:t>PRODUCTO 3.4.3  ·  ELEMENTO 2 · Ejecutar</a:t>
             </a:r>
@@ -3291,9 +3291,9 @@
                 <a:solidFill>
                   <a:srgbClr val="FFFFFF"/>
                 </a:solidFill>
-                <a:latin typeface="Calibri"/>
-              </a:rPr>
-              <a:t>Material de capacitación al personal</a:t>
+                <a:latin typeface="Afacad"/>
+              </a:rPr>
+              <a:t>Material de capacitación para la adopción de soluciones de IA</a:t>
             </a:r>
           </a:p>
         </p:txBody>
@@ -3324,9 +3324,9 @@
             <a:r>
               <a:rPr sz="2000" b="0" i="1">
                 <a:solidFill>
-                  <a:srgbClr val="F0F7FF"/>
-                </a:solidFill>
-                <a:latin typeface="Calibri"/>
+                  <a:srgbClr val="EAF4FF"/>
+                </a:solidFill>
+                <a:latin typeface="Afacad"/>
               </a:rPr>
               <a:t>Material de capacitación al personal</a:t>
             </a:r>
@@ -3361,7 +3361,7 @@
                 <a:solidFill>
                   <a:srgbClr val="F7C031"/>
                 </a:solidFill>
-                <a:latin typeface="Calibri"/>
+                <a:latin typeface="Afacad"/>
               </a:rPr>
               <a:t>Mi CompañIA  ·  FUNDES Latinoamérica con el apoyo de Google.org</a:t>
             </a:r>
@@ -3552,7 +3552,7 @@
                 <a:solidFill>
                   <a:srgbClr val="F7C031"/>
                 </a:solidFill>
-                <a:latin typeface="Calibri"/>
+                <a:latin typeface="Afacad"/>
               </a:rPr>
               <a:t>Mi CompañIA</a:t>
             </a:r>
@@ -3587,9 +3587,9 @@
                 <a:solidFill>
                   <a:srgbClr val="FFFFFF"/>
                 </a:solidFill>
-                <a:latin typeface="Calibri"/>
-              </a:rPr>
-              <a:t>· Material de capacitación al personal</a:t>
+                <a:latin typeface="Afacad"/>
+              </a:rPr>
+              <a:t>· Material de capacitación para la adopción de soluciones de IA</a:t>
             </a:r>
           </a:p>
         </p:txBody>
@@ -3622,7 +3622,7 @@
                 <a:solidFill>
                   <a:srgbClr val="F7C031"/>
                 </a:solidFill>
-                <a:latin typeface="Calibri"/>
+                <a:latin typeface="Afacad"/>
               </a:rPr>
               <a:t>Producto 3.4.3</a:t>
             </a:r>
@@ -3708,7 +3708,7 @@
                 <a:solidFill>
                   <a:srgbClr val="F7C031"/>
                 </a:solidFill>
-                <a:latin typeface="Calibri"/>
+                <a:latin typeface="Afacad"/>
               </a:rPr>
               <a:t>LÁMINA 6</a:t>
             </a:r>
@@ -3743,7 +3743,7 @@
                 <a:solidFill>
                   <a:srgbClr val="28467E"/>
                 </a:solidFill>
-                <a:latin typeface="Calibri"/>
+                <a:latin typeface="Afacad"/>
               </a:rPr>
               <a:t>Adaptación al nivel digital del personal</a:t>
             </a:r>
@@ -3819,9 +3819,9 @@
             <a:r>
               <a:rPr sz="1300" b="0" i="1">
                 <a:solidFill>
-                  <a:srgbClr val="666666"/>
-                </a:solidFill>
-                <a:latin typeface="Calibri"/>
+                  <a:srgbClr val="4B5563"/>
+                </a:solidFill>
+                <a:latin typeface="Afacad"/>
               </a:rPr>
               <a:t>Si el personal no maneja tecnicismos, usa lenguaje cotidiano. Si están acostumbrados a apps, puedes ir más rápido.</a:t>
             </a:r>
@@ -3843,11 +3843,11 @@
             <a:avLst/>
           </a:prstGeom>
           <a:solidFill>
-            <a:srgbClr val="F0F7FF"/>
+            <a:srgbClr val="EAF4FF"/>
           </a:solidFill>
           <a:ln w="9525">
             <a:solidFill>
-              <a:srgbClr val="CCE0F5"/>
+              <a:srgbClr val="D9E4F2"/>
             </a:solidFill>
           </a:ln>
         </p:spPr>
@@ -3873,7 +3873,7 @@
             <a:r>
               <a:rPr sz="1300" i="1">
                 <a:solidFill>
-                  <a:srgbClr val="6D8DB6"/>
+                  <a:srgbClr val="529ED7"/>
                 </a:solidFill>
               </a:rPr>
               <a:t>📷  Inserta aquí la captura
@@ -3897,7 +3897,7 @@
             <a:avLst/>
           </a:prstGeom>
           <a:solidFill>
-            <a:srgbClr val="FAFAFA"/>
+            <a:srgbClr val="FAFCFF"/>
           </a:solidFill>
           <a:ln>
             <a:noFill/>
@@ -3940,7 +3940,7 @@
             <a:r>
               <a:rPr sz="1200" i="1">
                 <a:solidFill>
-                  <a:srgbClr val="AAAAAA"/>
+                  <a:srgbClr val="4B5563"/>
                 </a:solidFill>
               </a:rPr>
               <a:t>[ Escribe aquí qué decir mientras muestras la captura. Ejemplos reales de la MiPyME van mejor que descripciones genéricas. ]</a:t>
@@ -4019,7 +4019,7 @@
                 <a:solidFill>
                   <a:srgbClr val="28467E"/>
                 </a:solidFill>
-                <a:latin typeface="Calibri"/>
+                <a:latin typeface="Afacad"/>
               </a:rPr>
               <a:t>Mi CompañIA  ·  FUNDES Latinoamérica  ·  AIxMiPyMEs   ·   10 / 12</a:t>
             </a:r>
@@ -4158,7 +4158,7 @@
                 <a:solidFill>
                   <a:srgbClr val="F7C031"/>
                 </a:solidFill>
-                <a:latin typeface="Calibri"/>
+                <a:latin typeface="Afacad"/>
               </a:rPr>
               <a:t>Mi CompañIA</a:t>
             </a:r>
@@ -4193,9 +4193,9 @@
                 <a:solidFill>
                   <a:srgbClr val="FFFFFF"/>
                 </a:solidFill>
-                <a:latin typeface="Calibri"/>
-              </a:rPr>
-              <a:t>· Material de capacitación al personal</a:t>
+                <a:latin typeface="Afacad"/>
+              </a:rPr>
+              <a:t>· Material de capacitación para la adopción de soluciones de IA</a:t>
             </a:r>
           </a:p>
         </p:txBody>
@@ -4228,7 +4228,7 @@
                 <a:solidFill>
                   <a:srgbClr val="F7C031"/>
                 </a:solidFill>
-                <a:latin typeface="Calibri"/>
+                <a:latin typeface="Afacad"/>
               </a:rPr>
               <a:t>Producto 3.4.3</a:t>
             </a:r>
@@ -4314,7 +4314,7 @@
                 <a:solidFill>
                   <a:srgbClr val="F7C031"/>
                 </a:solidFill>
-                <a:latin typeface="Calibri"/>
+                <a:latin typeface="Afacad"/>
               </a:rPr>
               <a:t>LÁMINA 7</a:t>
             </a:r>
@@ -4349,7 +4349,7 @@
                 <a:solidFill>
                   <a:srgbClr val="28467E"/>
                 </a:solidFill>
-                <a:latin typeface="Calibri"/>
+                <a:latin typeface="Afacad"/>
               </a:rPr>
               <a:t>Lámina final · Recursos y soporte</a:t>
             </a:r>
@@ -4425,9 +4425,9 @@
             <a:r>
               <a:rPr sz="1300" b="0" i="1">
                 <a:solidFill>
-                  <a:srgbClr val="666666"/>
-                </a:solidFill>
-                <a:latin typeface="Calibri"/>
+                  <a:srgbClr val="4B5563"/>
+                </a:solidFill>
+                <a:latin typeface="Afacad"/>
               </a:rPr>
               <a:t>¿A quién acudir si algo falla? ¿Dónde encontrar este material después? ¿Cuándo se actualiza?</a:t>
             </a:r>
@@ -4449,11 +4449,11 @@
             <a:avLst/>
           </a:prstGeom>
           <a:solidFill>
-            <a:srgbClr val="F0F7FF"/>
+            <a:srgbClr val="EAF4FF"/>
           </a:solidFill>
           <a:ln w="9525">
             <a:solidFill>
-              <a:srgbClr val="CCE0F5"/>
+              <a:srgbClr val="D9E4F2"/>
             </a:solidFill>
           </a:ln>
         </p:spPr>
@@ -4479,7 +4479,7 @@
             <a:r>
               <a:rPr sz="1300" i="1">
                 <a:solidFill>
-                  <a:srgbClr val="6D8DB6"/>
+                  <a:srgbClr val="529ED7"/>
                 </a:solidFill>
               </a:rPr>
               <a:t>📷  Inserta aquí la captura
@@ -4503,7 +4503,7 @@
             <a:avLst/>
           </a:prstGeom>
           <a:solidFill>
-            <a:srgbClr val="FAFAFA"/>
+            <a:srgbClr val="FAFCFF"/>
           </a:solidFill>
           <a:ln>
             <a:noFill/>
@@ -4546,7 +4546,7 @@
             <a:r>
               <a:rPr sz="1200" i="1">
                 <a:solidFill>
-                  <a:srgbClr val="AAAAAA"/>
+                  <a:srgbClr val="4B5563"/>
                 </a:solidFill>
               </a:rPr>
               <a:t>[ Escribe aquí qué decir mientras muestras la captura. Ejemplos reales de la MiPyME van mejor que descripciones genéricas. ]</a:t>
@@ -4625,7 +4625,7 @@
                 <a:solidFill>
                   <a:srgbClr val="28467E"/>
                 </a:solidFill>
-                <a:latin typeface="Calibri"/>
+                <a:latin typeface="Afacad"/>
               </a:rPr>
               <a:t>Mi CompañIA  ·  FUNDES Latinoamérica  ·  AIxMiPyMEs   ·   11 / 12</a:t>
             </a:r>
@@ -4721,7 +4721,7 @@
                 <a:solidFill>
                   <a:srgbClr val="F7C031"/>
                 </a:solidFill>
-                <a:latin typeface="Calibri"/>
+                <a:latin typeface="Afacad"/>
               </a:rPr>
               <a:t>¿Dudas durante la operación?</a:t>
             </a:r>
@@ -4756,7 +4756,7 @@
                 <a:solidFill>
                   <a:srgbClr val="FFFFFF"/>
                 </a:solidFill>
-                <a:latin typeface="Calibri"/>
+                <a:latin typeface="Afacad"/>
               </a:rPr>
               <a:t>Tu consultor sigue disponible. Datos de contacto en el Acta de cierre (producto 4.4.2).</a:t>
             </a:r>
@@ -4789,9 +4789,9 @@
             <a:r>
               <a:rPr sz="1400" b="0" i="1">
                 <a:solidFill>
-                  <a:srgbClr val="F0F7FF"/>
-                </a:solidFill>
-                <a:latin typeface="Calibri"/>
+                  <a:srgbClr val="EAF4FF"/>
+                </a:solidFill>
+                <a:latin typeface="Afacad"/>
               </a:rPr>
               <a:t>Este material puede actualizarse cuando se añadan nuevas FAQ o flujos.</a:t>
             </a:r>
@@ -4869,7 +4869,7 @@
                 <a:solidFill>
                   <a:srgbClr val="28467E"/>
                 </a:solidFill>
-                <a:latin typeface="Calibri"/>
+                <a:latin typeface="Afacad"/>
               </a:rPr>
               <a:t>Mi CompañIA  ·  FUNDES Latinoamérica con el apoyo de Google.org</a:t>
             </a:r>
@@ -5008,7 +5008,7 @@
                 <a:solidFill>
                   <a:srgbClr val="F7C031"/>
                 </a:solidFill>
-                <a:latin typeface="Calibri"/>
+                <a:latin typeface="Afacad"/>
               </a:rPr>
               <a:t>Mi CompañIA</a:t>
             </a:r>
@@ -5043,9 +5043,9 @@
                 <a:solidFill>
                   <a:srgbClr val="FFFFFF"/>
                 </a:solidFill>
-                <a:latin typeface="Calibri"/>
-              </a:rPr>
-              <a:t>· Material de capacitación al personal</a:t>
+                <a:latin typeface="Afacad"/>
+              </a:rPr>
+              <a:t>· Material de capacitación para la adopción de soluciones de IA</a:t>
             </a:r>
           </a:p>
         </p:txBody>
@@ -5078,7 +5078,7 @@
                 <a:solidFill>
                   <a:srgbClr val="F7C031"/>
                 </a:solidFill>
-                <a:latin typeface="Calibri"/>
+                <a:latin typeface="Afacad"/>
               </a:rPr>
               <a:t>Producto 3.4.3</a:t>
             </a:r>
@@ -5113,7 +5113,7 @@
                 <a:solidFill>
                   <a:srgbClr val="28467E"/>
                 </a:solidFill>
-                <a:latin typeface="Calibri"/>
+                <a:latin typeface="Afacad"/>
               </a:rPr>
               <a:t>Datos de esta capacitación</a:t>
             </a:r>
@@ -5146,9 +5146,9 @@
             <a:r>
               <a:rPr sz="1300" b="0" i="1">
                 <a:solidFill>
-                  <a:srgbClr val="666666"/>
-                </a:solidFill>
-                <a:latin typeface="Calibri"/>
+                  <a:srgbClr val="4B5563"/>
+                </a:solidFill>
+                <a:latin typeface="Afacad"/>
               </a:rPr>
               <a:t>Completa antes de impartirla. Define alcance, audiencia y tiempo para que el evaluador vea contexto.</a:t>
             </a:r>
@@ -5170,7 +5170,7 @@
             <a:avLst/>
           </a:prstGeom>
           <a:solidFill>
-            <a:srgbClr val="F0F7FF"/>
+            <a:srgbClr val="EAF4FF"/>
           </a:solidFill>
           <a:ln>
             <a:noFill/>
@@ -5226,7 +5226,7 @@
                 <a:solidFill>
                   <a:srgbClr val="28467E"/>
                 </a:solidFill>
-                <a:latin typeface="Calibri"/>
+                <a:latin typeface="Afacad"/>
               </a:rPr>
               <a:t>Nombre de la MiPyME:</a:t>
             </a:r>
@@ -5259,9 +5259,9 @@
             <a:r>
               <a:rPr sz="1300" b="0" i="0">
                 <a:solidFill>
-                  <a:srgbClr val="666666"/>
-                </a:solidFill>
-                <a:latin typeface="Calibri"/>
+                  <a:srgbClr val="4B5563"/>
+                </a:solidFill>
+                <a:latin typeface="Afacad"/>
               </a:rPr>
               <a:t>________________________________________</a:t>
             </a:r>
@@ -5283,7 +5283,7 @@
             <a:avLst/>
           </a:prstGeom>
           <a:solidFill>
-            <a:srgbClr val="F0F7FF"/>
+            <a:srgbClr val="EAF4FF"/>
           </a:solidFill>
           <a:ln>
             <a:noFill/>
@@ -5339,7 +5339,7 @@
                 <a:solidFill>
                   <a:srgbClr val="28467E"/>
                 </a:solidFill>
-                <a:latin typeface="Calibri"/>
+                <a:latin typeface="Afacad"/>
               </a:rPr>
               <a:t>Personal capacitado (nombres + cargo):</a:t>
             </a:r>
@@ -5372,9 +5372,9 @@
             <a:r>
               <a:rPr sz="1300" b="0" i="0">
                 <a:solidFill>
-                  <a:srgbClr val="666666"/>
-                </a:solidFill>
-                <a:latin typeface="Calibri"/>
+                  <a:srgbClr val="4B5563"/>
+                </a:solidFill>
+                <a:latin typeface="Afacad"/>
               </a:rPr>
               <a:t>________________________________________</a:t>
             </a:r>
@@ -5396,7 +5396,7 @@
             <a:avLst/>
           </a:prstGeom>
           <a:solidFill>
-            <a:srgbClr val="F0F7FF"/>
+            <a:srgbClr val="EAF4FF"/>
           </a:solidFill>
           <a:ln>
             <a:noFill/>
@@ -5452,7 +5452,7 @@
                 <a:solidFill>
                   <a:srgbClr val="28467E"/>
                 </a:solidFill>
-                <a:latin typeface="Calibri"/>
+                <a:latin typeface="Afacad"/>
               </a:rPr>
               <a:t>Fecha de la capacitación:</a:t>
             </a:r>
@@ -5485,9 +5485,9 @@
             <a:r>
               <a:rPr sz="1300" b="0" i="0">
                 <a:solidFill>
-                  <a:srgbClr val="666666"/>
-                </a:solidFill>
-                <a:latin typeface="Calibri"/>
+                  <a:srgbClr val="4B5563"/>
+                </a:solidFill>
+                <a:latin typeface="Afacad"/>
               </a:rPr>
               <a:t>________________________________________</a:t>
             </a:r>
@@ -5509,7 +5509,7 @@
             <a:avLst/>
           </a:prstGeom>
           <a:solidFill>
-            <a:srgbClr val="F0F7FF"/>
+            <a:srgbClr val="EAF4FF"/>
           </a:solidFill>
           <a:ln>
             <a:noFill/>
@@ -5565,7 +5565,7 @@
                 <a:solidFill>
                   <a:srgbClr val="28467E"/>
                 </a:solidFill>
-                <a:latin typeface="Calibri"/>
+                <a:latin typeface="Afacad"/>
               </a:rPr>
               <a:t>Duración estimada:</a:t>
             </a:r>
@@ -5598,9 +5598,9 @@
             <a:r>
               <a:rPr sz="1300" b="0" i="0">
                 <a:solidFill>
-                  <a:srgbClr val="666666"/>
-                </a:solidFill>
-                <a:latin typeface="Calibri"/>
+                  <a:srgbClr val="4B5563"/>
+                </a:solidFill>
+                <a:latin typeface="Afacad"/>
               </a:rPr>
               <a:t>________________________________________</a:t>
             </a:r>
@@ -5622,7 +5622,7 @@
             <a:avLst/>
           </a:prstGeom>
           <a:solidFill>
-            <a:srgbClr val="F0F7FF"/>
+            <a:srgbClr val="EAF4FF"/>
           </a:solidFill>
           <a:ln>
             <a:noFill/>
@@ -5678,7 +5678,7 @@
                 <a:solidFill>
                   <a:srgbClr val="28467E"/>
                 </a:solidFill>
-                <a:latin typeface="Calibri"/>
+                <a:latin typeface="Afacad"/>
               </a:rPr>
               <a:t>Soluciones cubiertas en esta sesión:</a:t>
             </a:r>
@@ -5711,9 +5711,9 @@
             <a:r>
               <a:rPr sz="1300" b="0" i="0">
                 <a:solidFill>
-                  <a:srgbClr val="666666"/>
-                </a:solidFill>
-                <a:latin typeface="Calibri"/>
+                  <a:srgbClr val="4B5563"/>
+                </a:solidFill>
+                <a:latin typeface="Afacad"/>
               </a:rPr>
               <a:t>________________________________________</a:t>
             </a:r>
@@ -5791,7 +5791,7 @@
                 <a:solidFill>
                   <a:srgbClr val="28467E"/>
                 </a:solidFill>
-                <a:latin typeface="Calibri"/>
+                <a:latin typeface="Afacad"/>
               </a:rPr>
               <a:t>Mi CompañIA  ·  FUNDES Latinoamérica  ·  AIxMiPyMEs   ·   2 / 12</a:t>
             </a:r>
@@ -5930,7 +5930,7 @@
                 <a:solidFill>
                   <a:srgbClr val="F7C031"/>
                 </a:solidFill>
-                <a:latin typeface="Calibri"/>
+                <a:latin typeface="Afacad"/>
               </a:rPr>
               <a:t>Mi CompañIA</a:t>
             </a:r>
@@ -5965,9 +5965,9 @@
                 <a:solidFill>
                   <a:srgbClr val="FFFFFF"/>
                 </a:solidFill>
-                <a:latin typeface="Calibri"/>
-              </a:rPr>
-              <a:t>· Material de capacitación al personal</a:t>
+                <a:latin typeface="Afacad"/>
+              </a:rPr>
+              <a:t>· Material de capacitación para la adopción de soluciones de IA</a:t>
             </a:r>
           </a:p>
         </p:txBody>
@@ -6000,7 +6000,7 @@
                 <a:solidFill>
                   <a:srgbClr val="F7C031"/>
                 </a:solidFill>
-                <a:latin typeface="Calibri"/>
+                <a:latin typeface="Afacad"/>
               </a:rPr>
               <a:t>Producto 3.4.3</a:t>
             </a:r>
@@ -6035,7 +6035,7 @@
                 <a:solidFill>
                   <a:srgbClr val="28467E"/>
                 </a:solidFill>
-                <a:latin typeface="Calibri"/>
+                <a:latin typeface="Afacad"/>
               </a:rPr>
               <a:t>Criterio F21 · qué evalúa el verificador</a:t>
             </a:r>
@@ -6068,9 +6068,9 @@
             <a:r>
               <a:rPr sz="1200" b="0" i="1">
                 <a:solidFill>
-                  <a:srgbClr val="666666"/>
-                </a:solidFill>
-                <a:latin typeface="Calibri"/>
+                  <a:srgbClr val="4B5563"/>
+                </a:solidFill>
+                <a:latin typeface="Afacad"/>
               </a:rPr>
               <a:t>Texto literal del F21 oficial. Tu material debe cubrir explícitamente cada punto.</a:t>
             </a:r>
@@ -6092,7 +6092,7 @@
             <a:avLst/>
           </a:prstGeom>
           <a:solidFill>
-            <a:srgbClr val="F0F7FF"/>
+            <a:srgbClr val="EAF4FF"/>
           </a:solidFill>
           <a:ln>
             <a:noFill/>
@@ -6172,7 +6172,7 @@
                   <a:srgbClr val="28467E"/>
                 </a:solidFill>
               </a:rPr>
-              <a:t>•  Incluye las buenas prácticas de uso y las acciones a realizar ante errores frecuentes</a:t>
+              <a:t>•  Incluye las buenas prácticas de uso y las acciones a realizar ante errores frecuentes en la operación de la solución</a:t>
             </a:r>
           </a:p>
           <a:p>
@@ -6187,7 +6187,7 @@
                   <a:srgbClr val="28467E"/>
                 </a:solidFill>
               </a:rPr>
-              <a:t>•  Considera el nivel de alfabetización digital del personal capacitado</a:t>
+              <a:t>•  Está adaptado al nivel de alfabetización digital del personal capacitado</a:t>
             </a:r>
           </a:p>
           <a:p>
@@ -6278,7 +6278,7 @@
                 <a:solidFill>
                   <a:srgbClr val="28467E"/>
                 </a:solidFill>
-                <a:latin typeface="Calibri"/>
+                <a:latin typeface="Afacad"/>
               </a:rPr>
               <a:t>Mi CompañIA  ·  FUNDES Latinoamérica  ·  AIxMiPyMEs   ·   3 / 12</a:t>
             </a:r>
@@ -6417,7 +6417,7 @@
                 <a:solidFill>
                   <a:srgbClr val="F7C031"/>
                 </a:solidFill>
-                <a:latin typeface="Calibri"/>
+                <a:latin typeface="Afacad"/>
               </a:rPr>
               <a:t>Mi CompañIA</a:t>
             </a:r>
@@ -6452,9 +6452,9 @@
                 <a:solidFill>
                   <a:srgbClr val="FFFFFF"/>
                 </a:solidFill>
-                <a:latin typeface="Calibri"/>
-              </a:rPr>
-              <a:t>· Material de capacitación al personal</a:t>
+                <a:latin typeface="Afacad"/>
+              </a:rPr>
+              <a:t>· Material de capacitación para la adopción de soluciones de IA</a:t>
             </a:r>
           </a:p>
         </p:txBody>
@@ -6487,7 +6487,7 @@
                 <a:solidFill>
                   <a:srgbClr val="F7C031"/>
                 </a:solidFill>
-                <a:latin typeface="Calibri"/>
+                <a:latin typeface="Afacad"/>
               </a:rPr>
               <a:t>Producto 3.4.3</a:t>
             </a:r>
@@ -6522,7 +6522,7 @@
                 <a:solidFill>
                   <a:srgbClr val="28467E"/>
                 </a:solidFill>
-                <a:latin typeface="Calibri"/>
+                <a:latin typeface="Afacad"/>
               </a:rPr>
               <a:t>Ejemplo orientativo · caso La Espiga</a:t>
             </a:r>
@@ -6555,9 +6555,9 @@
             <a:r>
               <a:rPr sz="1200" b="0" i="1">
                 <a:solidFill>
-                  <a:srgbClr val="666666"/>
-                </a:solidFill>
-                <a:latin typeface="Calibri"/>
+                  <a:srgbClr val="4B5563"/>
+                </a:solidFill>
+                <a:latin typeface="Afacad"/>
               </a:rPr>
               <a:t>Solo para mostrar el TIPO de contenido. NO copies esto a tu MiPyME.</a:t>
             </a:r>
@@ -6579,7 +6579,7 @@
             <a:avLst/>
           </a:prstGeom>
           <a:solidFill>
-            <a:srgbClr val="FDF6E3"/>
+            <a:srgbClr val="FFFBF0"/>
           </a:solidFill>
           <a:ln>
             <a:noFill/>
@@ -6607,7 +6607,7 @@
             <a:r>
               <a:rPr sz="1600" i="1">
                 <a:solidFill>
-                  <a:srgbClr val="6A5208"/>
+                  <a:srgbClr val="28467E"/>
                 </a:solidFill>
               </a:rPr>
               <a:t>Material de La Espiga: presentación de 12 láminas + 3 prompts pre-cargados. Pensada para encargadas con uso intermedio de smartphone pero sin experiencia previa con asistentes de IA. Lenguaje sencillo, capturas grandes, lista de 'qué hacer si algo no funciona'.</a:t>
@@ -6686,7 +6686,7 @@
                 <a:solidFill>
                   <a:srgbClr val="28467E"/>
                 </a:solidFill>
-                <a:latin typeface="Calibri"/>
+                <a:latin typeface="Afacad"/>
               </a:rPr>
               <a:t>Mi CompañIA  ·  FUNDES Latinoamérica  ·  AIxMiPyMEs   ·   4 / 12</a:t>
             </a:r>
@@ -6825,7 +6825,7 @@
                 <a:solidFill>
                   <a:srgbClr val="F7C031"/>
                 </a:solidFill>
-                <a:latin typeface="Calibri"/>
+                <a:latin typeface="Afacad"/>
               </a:rPr>
               <a:t>Mi CompañIA</a:t>
             </a:r>
@@ -6860,9 +6860,9 @@
                 <a:solidFill>
                   <a:srgbClr val="FFFFFF"/>
                 </a:solidFill>
-                <a:latin typeface="Calibri"/>
-              </a:rPr>
-              <a:t>· Material de capacitación al personal</a:t>
+                <a:latin typeface="Afacad"/>
+              </a:rPr>
+              <a:t>· Material de capacitación para la adopción de soluciones de IA</a:t>
             </a:r>
           </a:p>
         </p:txBody>
@@ -6895,7 +6895,7 @@
                 <a:solidFill>
                   <a:srgbClr val="F7C031"/>
                 </a:solidFill>
-                <a:latin typeface="Calibri"/>
+                <a:latin typeface="Afacad"/>
               </a:rPr>
               <a:t>Producto 3.4.3</a:t>
             </a:r>
@@ -6981,7 +6981,7 @@
                 <a:solidFill>
                   <a:srgbClr val="F7C031"/>
                 </a:solidFill>
-                <a:latin typeface="Calibri"/>
+                <a:latin typeface="Afacad"/>
               </a:rPr>
               <a:t>LÁMINA 1</a:t>
             </a:r>
@@ -7016,7 +7016,7 @@
                 <a:solidFill>
                   <a:srgbClr val="28467E"/>
                 </a:solidFill>
-                <a:latin typeface="Calibri"/>
+                <a:latin typeface="Afacad"/>
               </a:rPr>
               <a:t>Lámina 1 · Bienvenida y objetivos del material</a:t>
             </a:r>
@@ -7092,9 +7092,9 @@
             <a:r>
               <a:rPr sz="1300" b="0" i="1">
                 <a:solidFill>
-                  <a:srgbClr val="666666"/>
-                </a:solidFill>
-                <a:latin typeface="Calibri"/>
+                  <a:srgbClr val="4B5563"/>
+                </a:solidFill>
+                <a:latin typeface="Afacad"/>
               </a:rPr>
               <a:t>¿Qué van a aprender? ¿Cuánto tiempo tomará? ¿Para qué les servirá en su día a día?</a:t>
             </a:r>
@@ -7116,11 +7116,11 @@
             <a:avLst/>
           </a:prstGeom>
           <a:solidFill>
-            <a:srgbClr val="F0F7FF"/>
+            <a:srgbClr val="EAF4FF"/>
           </a:solidFill>
           <a:ln w="9525">
             <a:solidFill>
-              <a:srgbClr val="CCE0F5"/>
+              <a:srgbClr val="D9E4F2"/>
             </a:solidFill>
           </a:ln>
         </p:spPr>
@@ -7146,7 +7146,7 @@
             <a:r>
               <a:rPr sz="1300" i="1">
                 <a:solidFill>
-                  <a:srgbClr val="6D8DB6"/>
+                  <a:srgbClr val="529ED7"/>
                 </a:solidFill>
               </a:rPr>
               <a:t>📷  Inserta aquí la captura
@@ -7170,7 +7170,7 @@
             <a:avLst/>
           </a:prstGeom>
           <a:solidFill>
-            <a:srgbClr val="FAFAFA"/>
+            <a:srgbClr val="FAFCFF"/>
           </a:solidFill>
           <a:ln>
             <a:noFill/>
@@ -7213,7 +7213,7 @@
             <a:r>
               <a:rPr sz="1200" i="1">
                 <a:solidFill>
-                  <a:srgbClr val="AAAAAA"/>
+                  <a:srgbClr val="4B5563"/>
                 </a:solidFill>
               </a:rPr>
               <a:t>[ Escribe aquí qué decir mientras muestras la captura. Ejemplos reales de la MiPyME van mejor que descripciones genéricas. ]</a:t>
@@ -7292,7 +7292,7 @@
                 <a:solidFill>
                   <a:srgbClr val="28467E"/>
                 </a:solidFill>
-                <a:latin typeface="Calibri"/>
+                <a:latin typeface="Afacad"/>
               </a:rPr>
               <a:t>Mi CompañIA  ·  FUNDES Latinoamérica  ·  AIxMiPyMEs   ·   5 / 12</a:t>
             </a:r>
@@ -7431,7 +7431,7 @@
                 <a:solidFill>
                   <a:srgbClr val="F7C031"/>
                 </a:solidFill>
-                <a:latin typeface="Calibri"/>
+                <a:latin typeface="Afacad"/>
               </a:rPr>
               <a:t>Mi CompañIA</a:t>
             </a:r>
@@ -7466,9 +7466,9 @@
                 <a:solidFill>
                   <a:srgbClr val="FFFFFF"/>
                 </a:solidFill>
-                <a:latin typeface="Calibri"/>
-              </a:rPr>
-              <a:t>· Material de capacitación al personal</a:t>
+                <a:latin typeface="Afacad"/>
+              </a:rPr>
+              <a:t>· Material de capacitación para la adopción de soluciones de IA</a:t>
             </a:r>
           </a:p>
         </p:txBody>
@@ -7501,7 +7501,7 @@
                 <a:solidFill>
                   <a:srgbClr val="F7C031"/>
                 </a:solidFill>
-                <a:latin typeface="Calibri"/>
+                <a:latin typeface="Afacad"/>
               </a:rPr>
               <a:t>Producto 3.4.3</a:t>
             </a:r>
@@ -7587,7 +7587,7 @@
                 <a:solidFill>
                   <a:srgbClr val="F7C031"/>
                 </a:solidFill>
-                <a:latin typeface="Calibri"/>
+                <a:latin typeface="Afacad"/>
               </a:rPr>
               <a:t>LÁMINA 2</a:t>
             </a:r>
@@ -7622,7 +7622,7 @@
                 <a:solidFill>
                   <a:srgbClr val="28467E"/>
                 </a:solidFill>
-                <a:latin typeface="Calibri"/>
+                <a:latin typeface="Afacad"/>
               </a:rPr>
               <a:t>Láminas 2-N · Instrucciones paso a paso por herramienta</a:t>
             </a:r>
@@ -7698,9 +7698,9 @@
             <a:r>
               <a:rPr sz="1300" b="0" i="1">
                 <a:solidFill>
-                  <a:srgbClr val="666666"/>
-                </a:solidFill>
-                <a:latin typeface="Calibri"/>
+                  <a:srgbClr val="4B5563"/>
+                </a:solidFill>
+                <a:latin typeface="Afacad"/>
               </a:rPr>
               <a:t>Por cada herramienta: capturas numeradas con el flujo completo de uso. Si la herramienta tiene 5 botones importantes, dedica 1 lámina por botón. Visual antes que texto.</a:t>
             </a:r>
@@ -7722,11 +7722,11 @@
             <a:avLst/>
           </a:prstGeom>
           <a:solidFill>
-            <a:srgbClr val="F0F7FF"/>
+            <a:srgbClr val="EAF4FF"/>
           </a:solidFill>
           <a:ln w="9525">
             <a:solidFill>
-              <a:srgbClr val="CCE0F5"/>
+              <a:srgbClr val="D9E4F2"/>
             </a:solidFill>
           </a:ln>
         </p:spPr>
@@ -7752,7 +7752,7 @@
             <a:r>
               <a:rPr sz="1300" i="1">
                 <a:solidFill>
-                  <a:srgbClr val="6D8DB6"/>
+                  <a:srgbClr val="529ED7"/>
                 </a:solidFill>
               </a:rPr>
               <a:t>📷  Inserta aquí la captura
@@ -7776,7 +7776,7 @@
             <a:avLst/>
           </a:prstGeom>
           <a:solidFill>
-            <a:srgbClr val="FAFAFA"/>
+            <a:srgbClr val="FAFCFF"/>
           </a:solidFill>
           <a:ln>
             <a:noFill/>
@@ -7819,7 +7819,7 @@
             <a:r>
               <a:rPr sz="1200" i="1">
                 <a:solidFill>
-                  <a:srgbClr val="AAAAAA"/>
+                  <a:srgbClr val="4B5563"/>
                 </a:solidFill>
               </a:rPr>
               <a:t>[ Escribe aquí qué decir mientras muestras la captura. Ejemplos reales de la MiPyME van mejor que descripciones genéricas. ]</a:t>
@@ -7898,7 +7898,7 @@
                 <a:solidFill>
                   <a:srgbClr val="28467E"/>
                 </a:solidFill>
-                <a:latin typeface="Calibri"/>
+                <a:latin typeface="Afacad"/>
               </a:rPr>
               <a:t>Mi CompañIA  ·  FUNDES Latinoamérica  ·  AIxMiPyMEs   ·   6 / 12</a:t>
             </a:r>
@@ -8037,7 +8037,7 @@
                 <a:solidFill>
                   <a:srgbClr val="F7C031"/>
                 </a:solidFill>
-                <a:latin typeface="Calibri"/>
+                <a:latin typeface="Afacad"/>
               </a:rPr>
               <a:t>Mi CompañIA</a:t>
             </a:r>
@@ -8072,9 +8072,9 @@
                 <a:solidFill>
                   <a:srgbClr val="FFFFFF"/>
                 </a:solidFill>
-                <a:latin typeface="Calibri"/>
-              </a:rPr>
-              <a:t>· Material de capacitación al personal</a:t>
+                <a:latin typeface="Afacad"/>
+              </a:rPr>
+              <a:t>· Material de capacitación para la adopción de soluciones de IA</a:t>
             </a:r>
           </a:p>
         </p:txBody>
@@ -8107,7 +8107,7 @@
                 <a:solidFill>
                   <a:srgbClr val="F7C031"/>
                 </a:solidFill>
-                <a:latin typeface="Calibri"/>
+                <a:latin typeface="Afacad"/>
               </a:rPr>
               <a:t>Producto 3.4.3</a:t>
             </a:r>
@@ -8193,7 +8193,7 @@
                 <a:solidFill>
                   <a:srgbClr val="F7C031"/>
                 </a:solidFill>
-                <a:latin typeface="Calibri"/>
+                <a:latin typeface="Afacad"/>
               </a:rPr>
               <a:t>LÁMINA 3</a:t>
             </a:r>
@@ -8228,7 +8228,7 @@
                 <a:solidFill>
                   <a:srgbClr val="28467E"/>
                 </a:solidFill>
-                <a:latin typeface="Calibri"/>
+                <a:latin typeface="Afacad"/>
               </a:rPr>
               <a:t>Ejemplos aplicados al contexto de la MiPyME</a:t>
             </a:r>
@@ -8304,9 +8304,9 @@
             <a:r>
               <a:rPr sz="1300" b="0" i="1">
                 <a:solidFill>
-                  <a:srgbClr val="666666"/>
-                </a:solidFill>
-                <a:latin typeface="Calibri"/>
+                  <a:srgbClr val="4B5563"/>
+                </a:solidFill>
+                <a:latin typeface="Afacad"/>
               </a:rPr>
               <a:t>Por cada herramienta: 2-3 ejemplos REALES de la MiPyME (no ejemplos genéricos). El personal debe poder decir 'ah, eso lo hago yo el lunes en la mañana'.</a:t>
             </a:r>
@@ -8328,11 +8328,11 @@
             <a:avLst/>
           </a:prstGeom>
           <a:solidFill>
-            <a:srgbClr val="F0F7FF"/>
+            <a:srgbClr val="EAF4FF"/>
           </a:solidFill>
           <a:ln w="9525">
             <a:solidFill>
-              <a:srgbClr val="CCE0F5"/>
+              <a:srgbClr val="D9E4F2"/>
             </a:solidFill>
           </a:ln>
         </p:spPr>
@@ -8358,7 +8358,7 @@
             <a:r>
               <a:rPr sz="1300" i="1">
                 <a:solidFill>
-                  <a:srgbClr val="6D8DB6"/>
+                  <a:srgbClr val="529ED7"/>
                 </a:solidFill>
               </a:rPr>
               <a:t>📷  Inserta aquí la captura
@@ -8382,7 +8382,7 @@
             <a:avLst/>
           </a:prstGeom>
           <a:solidFill>
-            <a:srgbClr val="FAFAFA"/>
+            <a:srgbClr val="FAFCFF"/>
           </a:solidFill>
           <a:ln>
             <a:noFill/>
@@ -8425,7 +8425,7 @@
             <a:r>
               <a:rPr sz="1200" i="1">
                 <a:solidFill>
-                  <a:srgbClr val="AAAAAA"/>
+                  <a:srgbClr val="4B5563"/>
                 </a:solidFill>
               </a:rPr>
               <a:t>[ Escribe aquí qué decir mientras muestras la captura. Ejemplos reales de la MiPyME van mejor que descripciones genéricas. ]</a:t>
@@ -8504,7 +8504,7 @@
                 <a:solidFill>
                   <a:srgbClr val="28467E"/>
                 </a:solidFill>
-                <a:latin typeface="Calibri"/>
+                <a:latin typeface="Afacad"/>
               </a:rPr>
               <a:t>Mi CompañIA  ·  FUNDES Latinoamérica  ·  AIxMiPyMEs   ·   7 / 12</a:t>
             </a:r>
@@ -8643,7 +8643,7 @@
                 <a:solidFill>
                   <a:srgbClr val="F7C031"/>
                 </a:solidFill>
-                <a:latin typeface="Calibri"/>
+                <a:latin typeface="Afacad"/>
               </a:rPr>
               <a:t>Mi CompañIA</a:t>
             </a:r>
@@ -8678,9 +8678,9 @@
                 <a:solidFill>
                   <a:srgbClr val="FFFFFF"/>
                 </a:solidFill>
-                <a:latin typeface="Calibri"/>
-              </a:rPr>
-              <a:t>· Material de capacitación al personal</a:t>
+                <a:latin typeface="Afacad"/>
+              </a:rPr>
+              <a:t>· Material de capacitación para la adopción de soluciones de IA</a:t>
             </a:r>
           </a:p>
         </p:txBody>
@@ -8713,7 +8713,7 @@
                 <a:solidFill>
                   <a:srgbClr val="F7C031"/>
                 </a:solidFill>
-                <a:latin typeface="Calibri"/>
+                <a:latin typeface="Afacad"/>
               </a:rPr>
               <a:t>Producto 3.4.3</a:t>
             </a:r>
@@ -8799,7 +8799,7 @@
                 <a:solidFill>
                   <a:srgbClr val="F7C031"/>
                 </a:solidFill>
-                <a:latin typeface="Calibri"/>
+                <a:latin typeface="Afacad"/>
               </a:rPr>
               <a:t>LÁMINA 4</a:t>
             </a:r>
@@ -8834,7 +8834,7 @@
                 <a:solidFill>
                   <a:srgbClr val="28467E"/>
                 </a:solidFill>
-                <a:latin typeface="Calibri"/>
+                <a:latin typeface="Afacad"/>
               </a:rPr>
               <a:t>Prompts recomendados</a:t>
             </a:r>
@@ -8910,9 +8910,9 @@
             <a:r>
               <a:rPr sz="1300" b="0" i="1">
                 <a:solidFill>
-                  <a:srgbClr val="666666"/>
-                </a:solidFill>
-                <a:latin typeface="Calibri"/>
+                  <a:srgbClr val="4B5563"/>
+                </a:solidFill>
+                <a:latin typeface="Afacad"/>
               </a:rPr>
               <a:t>Lista de 5-10 prompts que ya funcionan para los casos típicos. El personal los copia/pega; no se les pide redactar prompts desde cero.</a:t>
             </a:r>
@@ -9020,7 +9020,7 @@
             <a:r>
               <a:rPr sz="1300" i="1">
                 <a:solidFill>
-                  <a:srgbClr val="5A4400"/>
+                  <a:srgbClr val="28467E"/>
                 </a:solidFill>
                 <a:latin typeface="Consolas"/>
               </a:rPr>
@@ -9087,7 +9087,7 @@
             <a:avLst/>
           </a:prstGeom>
           <a:solidFill>
-            <a:srgbClr val="F0F7FF"/>
+            <a:srgbClr val="EAF4FF"/>
           </a:solidFill>
           <a:ln>
             <a:noFill/>
@@ -9130,7 +9130,7 @@
             <a:r>
               <a:rPr sz="1300" i="1">
                 <a:solidFill>
-                  <a:srgbClr val="5A4400"/>
+                  <a:srgbClr val="28467E"/>
                 </a:solidFill>
                 <a:latin typeface="Consolas"/>
               </a:rPr>
@@ -9210,7 +9210,7 @@
                 <a:solidFill>
                   <a:srgbClr val="28467E"/>
                 </a:solidFill>
-                <a:latin typeface="Calibri"/>
+                <a:latin typeface="Afacad"/>
               </a:rPr>
               <a:t>Mi CompañIA  ·  FUNDES Latinoamérica  ·  AIxMiPyMEs   ·   8 / 12</a:t>
             </a:r>
@@ -9349,7 +9349,7 @@
                 <a:solidFill>
                   <a:srgbClr val="F7C031"/>
                 </a:solidFill>
-                <a:latin typeface="Calibri"/>
+                <a:latin typeface="Afacad"/>
               </a:rPr>
               <a:t>Mi CompañIA</a:t>
             </a:r>
@@ -9384,9 +9384,9 @@
                 <a:solidFill>
                   <a:srgbClr val="FFFFFF"/>
                 </a:solidFill>
-                <a:latin typeface="Calibri"/>
-              </a:rPr>
-              <a:t>· Material de capacitación al personal</a:t>
+                <a:latin typeface="Afacad"/>
+              </a:rPr>
+              <a:t>· Material de capacitación para la adopción de soluciones de IA</a:t>
             </a:r>
           </a:p>
         </p:txBody>
@@ -9419,7 +9419,7 @@
                 <a:solidFill>
                   <a:srgbClr val="F7C031"/>
                 </a:solidFill>
-                <a:latin typeface="Calibri"/>
+                <a:latin typeface="Afacad"/>
               </a:rPr>
               <a:t>Producto 3.4.3</a:t>
             </a:r>
@@ -9505,7 +9505,7 @@
                 <a:solidFill>
                   <a:srgbClr val="F7C031"/>
                 </a:solidFill>
-                <a:latin typeface="Calibri"/>
+                <a:latin typeface="Afacad"/>
               </a:rPr>
               <a:t>LÁMINA 5</a:t>
             </a:r>
@@ -9540,7 +9540,7 @@
                 <a:solidFill>
                   <a:srgbClr val="28467E"/>
                 </a:solidFill>
-                <a:latin typeface="Calibri"/>
+                <a:latin typeface="Afacad"/>
               </a:rPr>
               <a:t>Errores frecuentes y qué hacer</a:t>
             </a:r>
@@ -9616,9 +9616,9 @@
             <a:r>
               <a:rPr sz="1300" b="0" i="1">
                 <a:solidFill>
-                  <a:srgbClr val="666666"/>
-                </a:solidFill>
-                <a:latin typeface="Calibri"/>
+                  <a:srgbClr val="4B5563"/>
+                </a:solidFill>
+                <a:latin typeface="Afacad"/>
               </a:rPr>
               <a:t>Tabla con: error común → cómo identificarlo → cómo resolverlo → cuándo escalar al consultor o a Carlos/Doña Beatriz.</a:t>
             </a:r>
@@ -9744,7 +9744,7 @@
                   </a:txBody>
                   <a:tcPr>
                     <a:solidFill>
-                      <a:srgbClr val="FAFAFA"/>
+                      <a:srgbClr val="FAFCFF"/>
                     </a:solidFill>
                   </a:tcPr>
                 </a:tc>
@@ -9756,7 +9756,7 @@
                   </a:txBody>
                   <a:tcPr>
                     <a:solidFill>
-                      <a:srgbClr val="FAFAFA"/>
+                      <a:srgbClr val="FAFCFF"/>
                     </a:solidFill>
                   </a:tcPr>
                 </a:tc>
@@ -9768,7 +9768,7 @@
                   </a:txBody>
                   <a:tcPr>
                     <a:solidFill>
-                      <a:srgbClr val="FAFAFA"/>
+                      <a:srgbClr val="FAFCFF"/>
                     </a:solidFill>
                   </a:tcPr>
                 </a:tc>
@@ -9780,7 +9780,7 @@
                   </a:txBody>
                   <a:tcPr>
                     <a:solidFill>
-                      <a:srgbClr val="FAFAFA"/>
+                      <a:srgbClr val="FAFCFF"/>
                     </a:solidFill>
                   </a:tcPr>
                 </a:tc>
@@ -9844,7 +9844,7 @@
                   </a:txBody>
                   <a:tcPr>
                     <a:solidFill>
-                      <a:srgbClr val="FAFAFA"/>
+                      <a:srgbClr val="FAFCFF"/>
                     </a:solidFill>
                   </a:tcPr>
                 </a:tc>
@@ -9856,7 +9856,7 @@
                   </a:txBody>
                   <a:tcPr>
                     <a:solidFill>
-                      <a:srgbClr val="FAFAFA"/>
+                      <a:srgbClr val="FAFCFF"/>
                     </a:solidFill>
                   </a:tcPr>
                 </a:tc>
@@ -9868,7 +9868,7 @@
                   </a:txBody>
                   <a:tcPr>
                     <a:solidFill>
-                      <a:srgbClr val="FAFAFA"/>
+                      <a:srgbClr val="FAFCFF"/>
                     </a:solidFill>
                   </a:tcPr>
                 </a:tc>
@@ -9880,7 +9880,7 @@
                   </a:txBody>
                   <a:tcPr>
                     <a:solidFill>
-                      <a:srgbClr val="FAFAFA"/>
+                      <a:srgbClr val="FAFCFF"/>
                     </a:solidFill>
                   </a:tcPr>
                 </a:tc>
@@ -10010,7 +10010,7 @@
                 <a:solidFill>
                   <a:srgbClr val="28467E"/>
                 </a:solidFill>
-                <a:latin typeface="Calibri"/>
+                <a:latin typeface="Afacad"/>
               </a:rPr>
               <a:t>Mi CompañIA  ·  FUNDES Latinoamérica  ·  AIxMiPyMEs   ·   9 / 12</a:t>
             </a:r>

--- a/estandar-a/templates/3-4-3-material-capacitacion.pptx
+++ b/estandar-a/templates/3-4-3-material-capacitacion.pptx
@@ -3363,7 +3363,7 @@
                 </a:solidFill>
                 <a:latin typeface="Afacad"/>
               </a:rPr>
-              <a:t>Mi CompañIA  ·  FUNDES Latinoamérica con el apoyo de Google.org</a:t>
+              <a:t>Mi CompañIA  ·  FUNDES México con el apoyo de Google.org</a:t>
             </a:r>
           </a:p>
         </p:txBody>
@@ -4021,7 +4021,7 @@
                 </a:solidFill>
                 <a:latin typeface="Afacad"/>
               </a:rPr>
-              <a:t>Mi CompañIA  ·  FUNDES Latinoamérica  ·  AIxMiPyMEs   ·   10 / 12</a:t>
+              <a:t>Mi CompañIA  ·  FUNDES México  ·  AIxMiPyMEs   ·   10 / 12</a:t>
             </a:r>
           </a:p>
         </p:txBody>
@@ -4627,7 +4627,7 @@
                 </a:solidFill>
                 <a:latin typeface="Afacad"/>
               </a:rPr>
-              <a:t>Mi CompañIA  ·  FUNDES Latinoamérica  ·  AIxMiPyMEs   ·   11 / 12</a:t>
+              <a:t>Mi CompañIA  ·  FUNDES México  ·  AIxMiPyMEs   ·   11 / 12</a:t>
             </a:r>
           </a:p>
         </p:txBody>
@@ -4871,7 +4871,7 @@
                 </a:solidFill>
                 <a:latin typeface="Afacad"/>
               </a:rPr>
-              <a:t>Mi CompañIA  ·  FUNDES Latinoamérica con el apoyo de Google.org</a:t>
+              <a:t>Mi CompañIA  ·  FUNDES México con el apoyo de Google.org</a:t>
             </a:r>
           </a:p>
         </p:txBody>
@@ -5793,7 +5793,7 @@
                 </a:solidFill>
                 <a:latin typeface="Afacad"/>
               </a:rPr>
-              <a:t>Mi CompañIA  ·  FUNDES Latinoamérica  ·  AIxMiPyMEs   ·   2 / 12</a:t>
+              <a:t>Mi CompañIA  ·  FUNDES México  ·  AIxMiPyMEs   ·   2 / 12</a:t>
             </a:r>
           </a:p>
         </p:txBody>
@@ -6280,7 +6280,7 @@
                 </a:solidFill>
                 <a:latin typeface="Afacad"/>
               </a:rPr>
-              <a:t>Mi CompañIA  ·  FUNDES Latinoamérica  ·  AIxMiPyMEs   ·   3 / 12</a:t>
+              <a:t>Mi CompañIA  ·  FUNDES México  ·  AIxMiPyMEs   ·   3 / 12</a:t>
             </a:r>
           </a:p>
         </p:txBody>
@@ -6688,7 +6688,7 @@
                 </a:solidFill>
                 <a:latin typeface="Afacad"/>
               </a:rPr>
-              <a:t>Mi CompañIA  ·  FUNDES Latinoamérica  ·  AIxMiPyMEs   ·   4 / 12</a:t>
+              <a:t>Mi CompañIA  ·  FUNDES México  ·  AIxMiPyMEs   ·   4 / 12</a:t>
             </a:r>
           </a:p>
         </p:txBody>
@@ -7294,7 +7294,7 @@
                 </a:solidFill>
                 <a:latin typeface="Afacad"/>
               </a:rPr>
-              <a:t>Mi CompañIA  ·  FUNDES Latinoamérica  ·  AIxMiPyMEs   ·   5 / 12</a:t>
+              <a:t>Mi CompañIA  ·  FUNDES México  ·  AIxMiPyMEs   ·   5 / 12</a:t>
             </a:r>
           </a:p>
         </p:txBody>
@@ -7900,7 +7900,7 @@
                 </a:solidFill>
                 <a:latin typeface="Afacad"/>
               </a:rPr>
-              <a:t>Mi CompañIA  ·  FUNDES Latinoamérica  ·  AIxMiPyMEs   ·   6 / 12</a:t>
+              <a:t>Mi CompañIA  ·  FUNDES México  ·  AIxMiPyMEs   ·   6 / 12</a:t>
             </a:r>
           </a:p>
         </p:txBody>
@@ -8506,7 +8506,7 @@
                 </a:solidFill>
                 <a:latin typeface="Afacad"/>
               </a:rPr>
-              <a:t>Mi CompañIA  ·  FUNDES Latinoamérica  ·  AIxMiPyMEs   ·   7 / 12</a:t>
+              <a:t>Mi CompañIA  ·  FUNDES México  ·  AIxMiPyMEs   ·   7 / 12</a:t>
             </a:r>
           </a:p>
         </p:txBody>
@@ -9212,7 +9212,7 @@
                 </a:solidFill>
                 <a:latin typeface="Afacad"/>
               </a:rPr>
-              <a:t>Mi CompañIA  ·  FUNDES Latinoamérica  ·  AIxMiPyMEs   ·   8 / 12</a:t>
+              <a:t>Mi CompañIA  ·  FUNDES México  ·  AIxMiPyMEs   ·   8 / 12</a:t>
             </a:r>
           </a:p>
         </p:txBody>
@@ -10012,7 +10012,7 @@
                 </a:solidFill>
                 <a:latin typeface="Afacad"/>
               </a:rPr>
-              <a:t>Mi CompañIA  ·  FUNDES Latinoamérica  ·  AIxMiPyMEs   ·   9 / 12</a:t>
+              <a:t>Mi CompañIA  ·  FUNDES México  ·  AIxMiPyMEs   ·   9 / 12</a:t>
             </a:r>
           </a:p>
         </p:txBody>
